--- a/docs/Lectures/Week05/Week05_GEOG3319_ResponseWebMap.pptx
+++ b/docs/Lectures/Week05/Week05_GEOG3319_ResponseWebMap.pptx
@@ -8,14 +8,19 @@
     <p:sldMasterId id="2147483697" r:id="rId4"/>
   </p:sldMasterIdLst>
   <p:notesMasterIdLst>
-    <p:notesMasterId r:id="rId10"/>
+    <p:notesMasterId r:id="rId15"/>
   </p:notesMasterIdLst>
   <p:sldIdLst>
     <p:sldId id="914" r:id="rId5"/>
     <p:sldId id="1647" r:id="rId6"/>
     <p:sldId id="1648" r:id="rId7"/>
-    <p:sldId id="1649" r:id="rId8"/>
-    <p:sldId id="270" r:id="rId9"/>
+    <p:sldId id="1650" r:id="rId8"/>
+    <p:sldId id="1651" r:id="rId9"/>
+    <p:sldId id="1649" r:id="rId10"/>
+    <p:sldId id="1652" r:id="rId11"/>
+    <p:sldId id="1653" r:id="rId12"/>
+    <p:sldId id="1654" r:id="rId13"/>
+    <p:sldId id="270" r:id="rId14"/>
   </p:sldIdLst>
   <p:sldSz cx="8229600" cy="5143500"/>
   <p:notesSz cx="7010400" cy="9296400"/>
@@ -550,7 +555,7 @@
             <a:fld id="{56507943-197E-CE46-82F0-5A323A24AE7A}" type="slidenum">
               <a:rPr lang="en-US" smtClean="0"/>
               <a:pPr/>
-              <a:t>5</a:t>
+              <a:t>10</a:t>
             </a:fld>
             <a:endParaRPr lang="en-US"/>
           </a:p>
@@ -16158,6 +16163,186 @@
 </p:sld>
 </file>
 
+<file path=ppt/slides/slide10.xml><?xml version="1.0" encoding="utf-8"?>
+<p:sld xmlns:a="http://schemas.openxmlformats.org/drawingml/2006/main" xmlns:r="http://schemas.openxmlformats.org/officeDocument/2006/relationships" xmlns:p="http://schemas.openxmlformats.org/presentationml/2006/main">
+  <p:cSld>
+    <p:spTree>
+      <p:nvGrpSpPr>
+        <p:cNvPr id="1" name=""/>
+        <p:cNvGrpSpPr/>
+        <p:nvPr/>
+      </p:nvGrpSpPr>
+      <p:grpSpPr>
+        <a:xfrm>
+          <a:off x="0" y="0"/>
+          <a:ext cx="0" cy="0"/>
+          <a:chOff x="0" y="0"/>
+          <a:chExt cx="0" cy="0"/>
+        </a:xfrm>
+      </p:grpSpPr>
+      <p:sp>
+        <p:nvSpPr>
+          <p:cNvPr id="2" name="Rectangle 1"/>
+          <p:cNvSpPr/>
+          <p:nvPr/>
+        </p:nvSpPr>
+        <p:spPr>
+          <a:xfrm>
+            <a:off x="2471305" y="1325254"/>
+            <a:ext cx="3286989" cy="830997"/>
+          </a:xfrm>
+          <a:prstGeom prst="rect">
+            <a:avLst/>
+          </a:prstGeom>
+          <a:noFill/>
+        </p:spPr>
+        <p:txBody>
+          <a:bodyPr wrap="none" lIns="82296" tIns="41148" rIns="82296" bIns="41148">
+            <a:spAutoFit/>
+          </a:bodyPr>
+          <a:lstStyle/>
+          <a:p>
+            <a:pPr algn="ctr"/>
+            <a:r>
+              <a:rPr lang="en-US" sz="4860" b="1" spc="180" dirty="0">
+                <a:ln w="29210">
+                  <a:solidFill>
+                    <a:schemeClr val="accent3">
+                      <a:tint val="10000"/>
+                    </a:schemeClr>
+                  </a:solidFill>
+                </a:ln>
+                <a:solidFill>
+                  <a:srgbClr val="008000">
+                    <a:alpha val="50000"/>
+                  </a:srgbClr>
+                </a:solidFill>
+                <a:effectLst>
+                  <a:innerShdw blurRad="50800" dist="50800" dir="8100000">
+                    <a:srgbClr val="7D7D7D">
+                      <a:alpha val="73000"/>
+                    </a:srgbClr>
+                  </a:innerShdw>
+                </a:effectLst>
+              </a:rPr>
+              <a:t>Thank you!</a:t>
+            </a:r>
+          </a:p>
+        </p:txBody>
+      </p:sp>
+      <p:sp>
+        <p:nvSpPr>
+          <p:cNvPr id="3" name="Slide Number Placeholder 2">
+            <a:extLst>
+              <a:ext uri="{FF2B5EF4-FFF2-40B4-BE49-F238E27FC236}">
+                <a16:creationId xmlns:a16="http://schemas.microsoft.com/office/drawing/2014/main" id="{863C9EAE-E5B7-4784-94CD-D062E17813E3}"/>
+              </a:ext>
+            </a:extLst>
+          </p:cNvPr>
+          <p:cNvSpPr>
+            <a:spLocks noGrp="1"/>
+          </p:cNvSpPr>
+          <p:nvPr>
+            <p:ph type="sldNum" sz="quarter" idx="12"/>
+          </p:nvPr>
+        </p:nvSpPr>
+        <p:spPr/>
+        <p:txBody>
+          <a:bodyPr/>
+          <a:lstStyle/>
+          <a:p>
+            <a:fld id="{127DDC20-79C9-9647-820E-6D40A3D210C3}" type="slidenum">
+              <a:rPr lang="en-US" smtClean="0"/>
+              <a:pPr/>
+              <a:t>10</a:t>
+            </a:fld>
+            <a:endParaRPr lang="en-US"/>
+          </a:p>
+        </p:txBody>
+      </p:sp>
+      <p:pic>
+        <p:nvPicPr>
+          <p:cNvPr id="6" name="Picture 5" descr="Geography department logo">
+            <a:extLst>
+              <a:ext uri="{FF2B5EF4-FFF2-40B4-BE49-F238E27FC236}">
+                <a16:creationId xmlns:a16="http://schemas.microsoft.com/office/drawing/2014/main" id="{32DE135F-68C6-4911-85BA-92ABB3F9F85C}"/>
+              </a:ext>
+            </a:extLst>
+          </p:cNvPr>
+          <p:cNvPicPr/>
+          <p:nvPr/>
+        </p:nvPicPr>
+        <p:blipFill>
+          <a:blip r:embed="rId3"/>
+          <a:stretch>
+            <a:fillRect/>
+          </a:stretch>
+        </p:blipFill>
+        <p:spPr>
+          <a:xfrm>
+            <a:off x="152400" y="4275667"/>
+            <a:ext cx="5915025" cy="758190"/>
+          </a:xfrm>
+          <a:prstGeom prst="rect">
+            <a:avLst/>
+          </a:prstGeom>
+        </p:spPr>
+      </p:pic>
+      <p:cxnSp>
+        <p:nvCxnSpPr>
+          <p:cNvPr id="7" name="Straight Connector 6">
+            <a:extLst>
+              <a:ext uri="{FF2B5EF4-FFF2-40B4-BE49-F238E27FC236}">
+                <a16:creationId xmlns:a16="http://schemas.microsoft.com/office/drawing/2014/main" id="{5ADF13BC-3A5F-4415-94E6-85FAF42998C9}"/>
+              </a:ext>
+            </a:extLst>
+          </p:cNvPr>
+          <p:cNvCxnSpPr/>
+          <p:nvPr/>
+        </p:nvCxnSpPr>
+        <p:spPr>
+          <a:xfrm>
+            <a:off x="152400" y="4182575"/>
+            <a:ext cx="8001000" cy="0"/>
+          </a:xfrm>
+          <a:prstGeom prst="line">
+            <a:avLst/>
+          </a:prstGeom>
+          <a:ln>
+            <a:solidFill>
+              <a:schemeClr val="tx1"/>
+            </a:solidFill>
+          </a:ln>
+          <a:effectLst/>
+        </p:spPr>
+        <p:style>
+          <a:lnRef idx="2">
+            <a:schemeClr val="accent1"/>
+          </a:lnRef>
+          <a:fillRef idx="0">
+            <a:schemeClr val="accent1"/>
+          </a:fillRef>
+          <a:effectRef idx="1">
+            <a:schemeClr val="accent1"/>
+          </a:effectRef>
+          <a:fontRef idx="minor">
+            <a:schemeClr val="tx1"/>
+          </a:fontRef>
+        </p:style>
+      </p:cxnSp>
+    </p:spTree>
+    <p:extLst>
+      <p:ext uri="{BB962C8B-B14F-4D97-AF65-F5344CB8AC3E}">
+        <p14:creationId xmlns:p14="http://schemas.microsoft.com/office/powerpoint/2010/main" val="2635223018"/>
+      </p:ext>
+    </p:extLst>
+  </p:cSld>
+  <p:clrMapOvr>
+    <a:masterClrMapping/>
+  </p:clrMapOvr>
+</p:sld>
+</file>
+
 <file path=ppt/slides/slide2.xml><?xml version="1.0" encoding="utf-8"?>
 <p:sld xmlns:a="http://schemas.openxmlformats.org/drawingml/2006/main" xmlns:r="http://schemas.openxmlformats.org/officeDocument/2006/relationships" xmlns:p="http://schemas.openxmlformats.org/presentationml/2006/main">
   <p:cSld>
@@ -17114,10 +17299,18 @@
           <a:lstStyle/>
           <a:p>
             <a:r>
-              <a:rPr lang="en-US" altLang="zh-CN" dirty="0"/>
+              <a:rPr lang="en-US" altLang="zh-CN" dirty="0">
+                <a:solidFill>
+                  <a:srgbClr val="7030A0"/>
+                </a:solidFill>
+              </a:rPr>
               <a:t>Response web-map</a:t>
             </a:r>
-            <a:endParaRPr lang="zh-CN" altLang="en-US" dirty="0"/>
+            <a:endParaRPr lang="zh-CN" altLang="en-US" dirty="0">
+              <a:solidFill>
+                <a:srgbClr val="7030A0"/>
+              </a:solidFill>
+            </a:endParaRPr>
           </a:p>
         </p:txBody>
       </p:sp>
@@ -17139,7 +17332,7 @@
         </p:nvSpPr>
         <p:spPr>
           <a:xfrm>
-            <a:off x="796834" y="1279221"/>
+            <a:off x="796834" y="1026414"/>
             <a:ext cx="6792686" cy="3090672"/>
           </a:xfrm>
         </p:spPr>
@@ -17230,7 +17423,7 @@
           <p:cNvPr id="2" name="Title 1">
             <a:extLst>
               <a:ext uri="{FF2B5EF4-FFF2-40B4-BE49-F238E27FC236}">
-                <a16:creationId xmlns:a16="http://schemas.microsoft.com/office/drawing/2014/main" id="{6440DCA2-F853-5F77-468E-98F0E2B1603E}"/>
+                <a16:creationId xmlns:a16="http://schemas.microsoft.com/office/drawing/2014/main" id="{9B564029-E2BD-BB11-3609-70158D06022F}"/>
               </a:ext>
             </a:extLst>
           </p:cNvPr>
@@ -17243,8 +17436,8 @@
         </p:nvSpPr>
         <p:spPr>
           <a:xfrm>
-            <a:off x="392305" y="526617"/>
-            <a:ext cx="7444991" cy="413909"/>
+            <a:off x="392305" y="454771"/>
+            <a:ext cx="7444991" cy="427976"/>
           </a:xfrm>
         </p:spPr>
         <p:txBody>
@@ -17252,10 +17445,18 @@
           <a:lstStyle/>
           <a:p>
             <a:r>
-              <a:rPr lang="en-US" altLang="zh-CN" dirty="0"/>
+              <a:rPr lang="en-US" altLang="zh-CN" dirty="0">
+                <a:solidFill>
+                  <a:srgbClr val="7030A0"/>
+                </a:solidFill>
+              </a:rPr>
               <a:t>Configurable web app template</a:t>
             </a:r>
-            <a:endParaRPr lang="zh-CN" altLang="en-US" dirty="0"/>
+            <a:endParaRPr lang="en-US" dirty="0">
+              <a:solidFill>
+                <a:srgbClr val="7030A0"/>
+              </a:solidFill>
+            </a:endParaRPr>
           </a:p>
         </p:txBody>
       </p:sp>
@@ -17264,7 +17465,7 @@
           <p:cNvPr id="3" name="Content Placeholder 2">
             <a:extLst>
               <a:ext uri="{FF2B5EF4-FFF2-40B4-BE49-F238E27FC236}">
-                <a16:creationId xmlns:a16="http://schemas.microsoft.com/office/drawing/2014/main" id="{F1B4BB31-DF73-A2B6-AF60-0D246C5CD134}"/>
+                <a16:creationId xmlns:a16="http://schemas.microsoft.com/office/drawing/2014/main" id="{06B4858B-D769-1373-9B74-BDD089C3301E}"/>
               </a:ext>
             </a:extLst>
           </p:cNvPr>
@@ -17275,19 +17476,107 @@
             <p:ph idx="1"/>
           </p:nvPr>
         </p:nvSpPr>
-        <p:spPr/>
-        <p:txBody>
-          <a:bodyPr/>
-          <a:lstStyle/>
-          <a:p>
-            <a:endParaRPr lang="zh-CN" altLang="en-US"/>
-          </a:p>
-        </p:txBody>
-      </p:sp>
+        <p:spPr>
+          <a:xfrm>
+            <a:off x="392304" y="961124"/>
+            <a:ext cx="7444990" cy="1954203"/>
+          </a:xfrm>
+        </p:spPr>
+        <p:txBody>
+          <a:bodyPr>
+            <a:normAutofit/>
+          </a:bodyPr>
+          <a:lstStyle/>
+          <a:p>
+            <a:r>
+              <a:rPr lang="en-US" altLang="zh-CN" sz="1400" dirty="0"/>
+              <a:t>ArcGIS </a:t>
+            </a:r>
+            <a:r>
+              <a:rPr lang="en-US" altLang="zh-CN" sz="1400" dirty="0" err="1"/>
+              <a:t>StoryMaps</a:t>
+            </a:r>
+            <a:r>
+              <a:rPr lang="en-US" altLang="zh-CN" sz="1400" dirty="0"/>
+              <a:t>: </a:t>
+            </a:r>
+          </a:p>
+          <a:p>
+            <a:pPr lvl="1">
+              <a:buFont typeface="Wingdings" panose="05000000000000000000" pitchFamily="2" charset="2"/>
+              <a:buChar char="Ø"/>
+            </a:pPr>
+            <a:r>
+              <a:rPr lang="en-US" altLang="zh-CN" sz="1400" dirty="0"/>
+              <a:t>Allows users to craft interactive stories by combining maps with narrative text, images, and multimedia content. </a:t>
+            </a:r>
+          </a:p>
+          <a:p>
+            <a:pPr lvl="1">
+              <a:buFont typeface="Wingdings" panose="05000000000000000000" pitchFamily="2" charset="2"/>
+              <a:buChar char="Ø"/>
+            </a:pPr>
+            <a:r>
+              <a:rPr lang="en-US" altLang="zh-CN" sz="1400" dirty="0"/>
+              <a:t>This tool is designed to engage and inspire audiences with geographically enriched storytelling, making it perfect for educational purposes, advocacy, and public engagement. </a:t>
+            </a:r>
+          </a:p>
+          <a:p>
+            <a:pPr lvl="1">
+              <a:buFont typeface="Wingdings" panose="05000000000000000000" pitchFamily="2" charset="2"/>
+              <a:buChar char="Ø"/>
+            </a:pPr>
+            <a:r>
+              <a:rPr lang="en-US" altLang="zh-CN" sz="1400" dirty="0"/>
+              <a:t>ArcGIS </a:t>
+            </a:r>
+            <a:r>
+              <a:rPr lang="en-US" altLang="zh-CN" sz="1400" dirty="0" err="1"/>
+              <a:t>StoryMaps</a:t>
+            </a:r>
+            <a:r>
+              <a:rPr lang="en-US" altLang="zh-CN" sz="1400" dirty="0"/>
+              <a:t> provides a user-friendly interface that helps you connect with your audience through compelling geographic narratives.</a:t>
+            </a:r>
+            <a:endParaRPr lang="en-US" sz="1400" dirty="0"/>
+          </a:p>
+        </p:txBody>
+      </p:sp>
+      <p:pic>
+        <p:nvPicPr>
+          <p:cNvPr id="5" name="Picture 4">
+            <a:hlinkClick r:id="rId2"/>
+            <a:extLst>
+              <a:ext uri="{FF2B5EF4-FFF2-40B4-BE49-F238E27FC236}">
+                <a16:creationId xmlns:a16="http://schemas.microsoft.com/office/drawing/2014/main" id="{6629CCE3-6F1F-EAD6-94C5-D35B7ACC7124}"/>
+              </a:ext>
+            </a:extLst>
+          </p:cNvPr>
+          <p:cNvPicPr>
+            <a:picLocks noChangeAspect="1"/>
+          </p:cNvPicPr>
+          <p:nvPr/>
+        </p:nvPicPr>
+        <p:blipFill>
+          <a:blip r:embed="rId3"/>
+          <a:stretch>
+            <a:fillRect/>
+          </a:stretch>
+        </p:blipFill>
+        <p:spPr>
+          <a:xfrm>
+            <a:off x="1665514" y="2993704"/>
+            <a:ext cx="4696097" cy="1712430"/>
+          </a:xfrm>
+          <a:prstGeom prst="rect">
+            <a:avLst/>
+          </a:prstGeom>
+        </p:spPr>
+      </p:pic>
     </p:spTree>
     <p:extLst>
       <p:ext uri="{BB962C8B-B14F-4D97-AF65-F5344CB8AC3E}">
-        <p14:creationId xmlns:p14="http://schemas.microsoft.com/office/powerpoint/2010/main" val="2795100158"/>
+        <p14:creationId xmlns:p14="http://schemas.microsoft.com/office/powerpoint/2010/main" val="1538312381"/>
       </p:ext>
     </p:extLst>
   </p:cSld>
@@ -17316,60 +17605,10 @@
       </p:grpSpPr>
       <p:sp>
         <p:nvSpPr>
-          <p:cNvPr id="2" name="Rectangle 1"/>
-          <p:cNvSpPr/>
-          <p:nvPr/>
-        </p:nvSpPr>
-        <p:spPr>
-          <a:xfrm>
-            <a:off x="2471305" y="1325254"/>
-            <a:ext cx="3286989" cy="830997"/>
-          </a:xfrm>
-          <a:prstGeom prst="rect">
-            <a:avLst/>
-          </a:prstGeom>
-          <a:noFill/>
-        </p:spPr>
-        <p:txBody>
-          <a:bodyPr wrap="none" lIns="82296" tIns="41148" rIns="82296" bIns="41148">
-            <a:spAutoFit/>
-          </a:bodyPr>
-          <a:lstStyle/>
-          <a:p>
-            <a:pPr algn="ctr"/>
-            <a:r>
-              <a:rPr lang="en-US" sz="4860" b="1" spc="180" dirty="0">
-                <a:ln w="29210">
-                  <a:solidFill>
-                    <a:schemeClr val="accent3">
-                      <a:tint val="10000"/>
-                    </a:schemeClr>
-                  </a:solidFill>
-                </a:ln>
-                <a:solidFill>
-                  <a:srgbClr val="008000">
-                    <a:alpha val="50000"/>
-                  </a:srgbClr>
-                </a:solidFill>
-                <a:effectLst>
-                  <a:innerShdw blurRad="50800" dist="50800" dir="8100000">
-                    <a:srgbClr val="7D7D7D">
-                      <a:alpha val="73000"/>
-                    </a:srgbClr>
-                  </a:innerShdw>
-                </a:effectLst>
-              </a:rPr>
-              <a:t>Thank you!</a:t>
-            </a:r>
-          </a:p>
-        </p:txBody>
-      </p:sp>
-      <p:sp>
-        <p:nvSpPr>
-          <p:cNvPr id="3" name="Slide Number Placeholder 2">
+          <p:cNvPr id="2" name="Title 1">
             <a:extLst>
               <a:ext uri="{FF2B5EF4-FFF2-40B4-BE49-F238E27FC236}">
-                <a16:creationId xmlns:a16="http://schemas.microsoft.com/office/drawing/2014/main" id="{863C9EAE-E5B7-4784-94CD-D062E17813E3}"/>
+                <a16:creationId xmlns:a16="http://schemas.microsoft.com/office/drawing/2014/main" id="{2C91C307-F554-08B8-001B-0DCC08D7C95D}"/>
               </a:ext>
             </a:extLst>
           </p:cNvPr>
@@ -17377,33 +17616,118 @@
             <a:spLocks noGrp="1"/>
           </p:cNvSpPr>
           <p:nvPr>
-            <p:ph type="sldNum" sz="quarter" idx="12"/>
-          </p:nvPr>
-        </p:nvSpPr>
-        <p:spPr/>
-        <p:txBody>
-          <a:bodyPr/>
-          <a:lstStyle/>
-          <a:p>
-            <a:fld id="{127DDC20-79C9-9647-820E-6D40A3D210C3}" type="slidenum">
-              <a:rPr lang="en-US" smtClean="0"/>
-              <a:pPr/>
-              <a:t>5</a:t>
-            </a:fld>
-            <a:endParaRPr lang="en-US"/>
-          </a:p>
-        </p:txBody>
-      </p:sp>
-      <p:pic>
-        <p:nvPicPr>
-          <p:cNvPr id="6" name="Picture 5" descr="Geography department logo">
+            <p:ph type="title"/>
+          </p:nvPr>
+        </p:nvSpPr>
+        <p:spPr>
+          <a:xfrm>
+            <a:off x="392306" y="467834"/>
+            <a:ext cx="7444991" cy="458121"/>
+          </a:xfrm>
+        </p:spPr>
+        <p:txBody>
+          <a:bodyPr>
+            <a:normAutofit/>
+          </a:bodyPr>
+          <a:lstStyle/>
+          <a:p>
+            <a:r>
+              <a:rPr lang="en-US" altLang="zh-CN" dirty="0">
+                <a:solidFill>
+                  <a:srgbClr val="7030A0"/>
+                </a:solidFill>
+              </a:rPr>
+              <a:t>Configurable web app template</a:t>
+            </a:r>
+            <a:endParaRPr lang="en-US" dirty="0"/>
+          </a:p>
+        </p:txBody>
+      </p:sp>
+      <p:sp>
+        <p:nvSpPr>
+          <p:cNvPr id="3" name="Content Placeholder 2">
             <a:extLst>
               <a:ext uri="{FF2B5EF4-FFF2-40B4-BE49-F238E27FC236}">
-                <a16:creationId xmlns:a16="http://schemas.microsoft.com/office/drawing/2014/main" id="{32DE135F-68C6-4911-85BA-92ABB3F9F85C}"/>
+                <a16:creationId xmlns:a16="http://schemas.microsoft.com/office/drawing/2014/main" id="{D338045F-FCCE-5C78-E375-F60A5DA83A10}"/>
               </a:ext>
             </a:extLst>
           </p:cNvPr>
-          <p:cNvPicPr/>
+          <p:cNvSpPr>
+            <a:spLocks noGrp="1"/>
+          </p:cNvSpPr>
+          <p:nvPr>
+            <p:ph idx="1"/>
+          </p:nvPr>
+        </p:nvSpPr>
+        <p:spPr>
+          <a:xfrm>
+            <a:off x="392307" y="925955"/>
+            <a:ext cx="7444990" cy="1568849"/>
+          </a:xfrm>
+        </p:spPr>
+        <p:txBody>
+          <a:bodyPr>
+            <a:normAutofit/>
+          </a:bodyPr>
+          <a:lstStyle/>
+          <a:p>
+            <a:r>
+              <a:rPr lang="en-US" altLang="zh-CN" sz="1400" dirty="0">
+                <a:solidFill>
+                  <a:schemeClr val="tx1"/>
+                </a:solidFill>
+              </a:rPr>
+              <a:t>Dashboards</a:t>
+            </a:r>
+          </a:p>
+          <a:p>
+            <a:pPr lvl="1">
+              <a:buFont typeface="Wingdings" panose="05000000000000000000" pitchFamily="2" charset="2"/>
+              <a:buChar char="Ø"/>
+            </a:pPr>
+            <a:r>
+              <a:rPr lang="en-US" altLang="zh-CN" sz="1400" dirty="0">
+                <a:solidFill>
+                  <a:schemeClr val="tx1"/>
+                </a:solidFill>
+              </a:rPr>
+              <a:t>Displays geographic information as interactive maps, charts, gauges, and more, allowing for real-time data visualization and awareness at a glance. </a:t>
+            </a:r>
+          </a:p>
+          <a:p>
+            <a:pPr lvl="1">
+              <a:buFont typeface="Wingdings" panose="05000000000000000000" pitchFamily="2" charset="2"/>
+              <a:buChar char="Ø"/>
+            </a:pPr>
+            <a:r>
+              <a:rPr lang="en-US" altLang="zh-CN" sz="1400" dirty="0">
+                <a:solidFill>
+                  <a:schemeClr val="tx1"/>
+                </a:solidFill>
+              </a:rPr>
+              <a:t>Dashboards are widely used in emergency management, public services, and business operations to provide insights.</a:t>
+            </a:r>
+            <a:endParaRPr lang="en-US" sz="1400" dirty="0">
+              <a:solidFill>
+                <a:schemeClr val="tx1"/>
+              </a:solidFill>
+            </a:endParaRPr>
+          </a:p>
+        </p:txBody>
+      </p:sp>
+      <p:pic>
+        <p:nvPicPr>
+          <p:cNvPr id="5" name="Picture 4">
+            <a:hlinkClick r:id="rId2"/>
+            <a:extLst>
+              <a:ext uri="{FF2B5EF4-FFF2-40B4-BE49-F238E27FC236}">
+                <a16:creationId xmlns:a16="http://schemas.microsoft.com/office/drawing/2014/main" id="{7D64998A-9C64-C698-16B0-AFC26EC72B28}"/>
+              </a:ext>
+            </a:extLst>
+          </p:cNvPr>
+          <p:cNvPicPr>
+            <a:picLocks noChangeAspect="1"/>
+          </p:cNvPicPr>
           <p:nvPr/>
         </p:nvPicPr>
         <p:blipFill>
@@ -17414,60 +17738,705 @@
         </p:blipFill>
         <p:spPr>
           <a:xfrm>
-            <a:off x="152400" y="4275667"/>
-            <a:ext cx="5915025" cy="758190"/>
+            <a:off x="1338943" y="2494804"/>
+            <a:ext cx="5264331" cy="2366933"/>
           </a:xfrm>
           <a:prstGeom prst="rect">
             <a:avLst/>
           </a:prstGeom>
         </p:spPr>
       </p:pic>
-      <p:cxnSp>
-        <p:nvCxnSpPr>
-          <p:cNvPr id="7" name="Straight Connector 6">
+    </p:spTree>
+    <p:extLst>
+      <p:ext uri="{BB962C8B-B14F-4D97-AF65-F5344CB8AC3E}">
+        <p14:creationId xmlns:p14="http://schemas.microsoft.com/office/powerpoint/2010/main" val="883563931"/>
+      </p:ext>
+    </p:extLst>
+  </p:cSld>
+  <p:clrMapOvr>
+    <a:masterClrMapping/>
+  </p:clrMapOvr>
+</p:sld>
+</file>
+
+<file path=ppt/slides/slide6.xml><?xml version="1.0" encoding="utf-8"?>
+<p:sld xmlns:a="http://schemas.openxmlformats.org/drawingml/2006/main" xmlns:r="http://schemas.openxmlformats.org/officeDocument/2006/relationships" xmlns:p="http://schemas.openxmlformats.org/presentationml/2006/main">
+  <p:cSld>
+    <p:spTree>
+      <p:nvGrpSpPr>
+        <p:cNvPr id="1" name=""/>
+        <p:cNvGrpSpPr/>
+        <p:nvPr/>
+      </p:nvGrpSpPr>
+      <p:grpSpPr>
+        <a:xfrm>
+          <a:off x="0" y="0"/>
+          <a:ext cx="0" cy="0"/>
+          <a:chOff x="0" y="0"/>
+          <a:chExt cx="0" cy="0"/>
+        </a:xfrm>
+      </p:grpSpPr>
+      <p:sp>
+        <p:nvSpPr>
+          <p:cNvPr id="2" name="Title 1">
             <a:extLst>
               <a:ext uri="{FF2B5EF4-FFF2-40B4-BE49-F238E27FC236}">
-                <a16:creationId xmlns:a16="http://schemas.microsoft.com/office/drawing/2014/main" id="{5ADF13BC-3A5F-4415-94E6-85FAF42998C9}"/>
+                <a16:creationId xmlns:a16="http://schemas.microsoft.com/office/drawing/2014/main" id="{6440DCA2-F853-5F77-468E-98F0E2B1603E}"/>
               </a:ext>
             </a:extLst>
           </p:cNvPr>
-          <p:cNvCxnSpPr/>
+          <p:cNvSpPr>
+            <a:spLocks noGrp="1"/>
+          </p:cNvSpPr>
+          <p:nvPr>
+            <p:ph type="title"/>
+          </p:nvPr>
+        </p:nvSpPr>
+        <p:spPr>
+          <a:xfrm>
+            <a:off x="392305" y="526617"/>
+            <a:ext cx="7444991" cy="413909"/>
+          </a:xfrm>
+        </p:spPr>
+        <p:txBody>
+          <a:bodyPr/>
+          <a:lstStyle/>
+          <a:p>
+            <a:r>
+              <a:rPr lang="en-US" altLang="zh-CN" dirty="0">
+                <a:solidFill>
+                  <a:srgbClr val="7030A0"/>
+                </a:solidFill>
+              </a:rPr>
+              <a:t>Configurable web app template</a:t>
+            </a:r>
+            <a:endParaRPr lang="zh-CN" altLang="en-US" dirty="0">
+              <a:solidFill>
+                <a:srgbClr val="7030A0"/>
+              </a:solidFill>
+            </a:endParaRPr>
+          </a:p>
+        </p:txBody>
+      </p:sp>
+      <p:sp>
+        <p:nvSpPr>
+          <p:cNvPr id="3" name="Content Placeholder 2">
+            <a:extLst>
+              <a:ext uri="{FF2B5EF4-FFF2-40B4-BE49-F238E27FC236}">
+                <a16:creationId xmlns:a16="http://schemas.microsoft.com/office/drawing/2014/main" id="{F1B4BB31-DF73-A2B6-AF60-0D246C5CD134}"/>
+              </a:ext>
+            </a:extLst>
+          </p:cNvPr>
+          <p:cNvSpPr>
+            <a:spLocks noGrp="1"/>
+          </p:cNvSpPr>
+          <p:nvPr>
+            <p:ph idx="1"/>
+          </p:nvPr>
+        </p:nvSpPr>
+        <p:spPr>
+          <a:xfrm>
+            <a:off x="392304" y="1076380"/>
+            <a:ext cx="7444990" cy="1771323"/>
+          </a:xfrm>
+        </p:spPr>
+        <p:txBody>
+          <a:bodyPr>
+            <a:normAutofit/>
+          </a:bodyPr>
+          <a:lstStyle/>
+          <a:p>
+            <a:r>
+              <a:rPr lang="en-US" altLang="zh-CN" sz="1400" dirty="0"/>
+              <a:t>Instant Apps: </a:t>
+            </a:r>
+          </a:p>
+          <a:p>
+            <a:pPr lvl="1">
+              <a:buFont typeface="Wingdings" panose="05000000000000000000" pitchFamily="2" charset="2"/>
+              <a:buChar char="Ø"/>
+            </a:pPr>
+            <a:r>
+              <a:rPr lang="en-US" altLang="zh-CN" sz="1400" dirty="0"/>
+              <a:t>Enables users to quickly design and deploy web apps tailored to specific tasks and audiences. </a:t>
+            </a:r>
+          </a:p>
+          <a:p>
+            <a:pPr lvl="1">
+              <a:buFont typeface="Wingdings" panose="05000000000000000000" pitchFamily="2" charset="2"/>
+              <a:buChar char="Ø"/>
+            </a:pPr>
+            <a:r>
+              <a:rPr lang="en-US" altLang="zh-CN" sz="1400" dirty="0"/>
+              <a:t>The template-driven tools require minimal configuration, making it easier for users to visualize, present, and share geographic information. </a:t>
+            </a:r>
+          </a:p>
+          <a:p>
+            <a:pPr lvl="1">
+              <a:buFont typeface="Wingdings" panose="05000000000000000000" pitchFamily="2" charset="2"/>
+              <a:buChar char="Ø"/>
+            </a:pPr>
+            <a:r>
+              <a:rPr lang="en-US" altLang="zh-CN" sz="1400" dirty="0"/>
+              <a:t>Instant Apps are ideal for projects requiring simple functions, rapid deployment, and straightforward user interfaces.</a:t>
+            </a:r>
+            <a:endParaRPr lang="zh-CN" altLang="en-US" sz="1400" dirty="0"/>
+          </a:p>
+        </p:txBody>
+      </p:sp>
+      <p:pic>
+        <p:nvPicPr>
+          <p:cNvPr id="5" name="Picture 4">
+            <a:hlinkClick r:id="rId2"/>
+            <a:extLst>
+              <a:ext uri="{FF2B5EF4-FFF2-40B4-BE49-F238E27FC236}">
+                <a16:creationId xmlns:a16="http://schemas.microsoft.com/office/drawing/2014/main" id="{85B428B6-FE01-999A-4236-E7D59C490F69}"/>
+              </a:ext>
+            </a:extLst>
+          </p:cNvPr>
+          <p:cNvPicPr>
+            <a:picLocks noChangeAspect="1"/>
+          </p:cNvPicPr>
           <p:nvPr/>
-        </p:nvCxnSpPr>
-        <p:spPr>
-          <a:xfrm>
-            <a:off x="152400" y="4182575"/>
-            <a:ext cx="8001000" cy="0"/>
-          </a:xfrm>
-          <a:prstGeom prst="line">
+        </p:nvPicPr>
+        <p:blipFill>
+          <a:blip r:embed="rId3"/>
+          <a:stretch>
+            <a:fillRect/>
+          </a:stretch>
+        </p:blipFill>
+        <p:spPr>
+          <a:xfrm>
+            <a:off x="1561012" y="2847703"/>
+            <a:ext cx="5009606" cy="1898948"/>
+          </a:xfrm>
+          <a:prstGeom prst="rect">
             <a:avLst/>
           </a:prstGeom>
-          <a:ln>
-            <a:solidFill>
-              <a:schemeClr val="tx1"/>
-            </a:solidFill>
-          </a:ln>
-          <a:effectLst/>
-        </p:spPr>
-        <p:style>
-          <a:lnRef idx="2">
-            <a:schemeClr val="accent1"/>
-          </a:lnRef>
-          <a:fillRef idx="0">
-            <a:schemeClr val="accent1"/>
-          </a:fillRef>
-          <a:effectRef idx="1">
-            <a:schemeClr val="accent1"/>
-          </a:effectRef>
-          <a:fontRef idx="minor">
-            <a:schemeClr val="tx1"/>
-          </a:fontRef>
-        </p:style>
-      </p:cxnSp>
+        </p:spPr>
+      </p:pic>
     </p:spTree>
     <p:extLst>
       <p:ext uri="{BB962C8B-B14F-4D97-AF65-F5344CB8AC3E}">
-        <p14:creationId xmlns:p14="http://schemas.microsoft.com/office/powerpoint/2010/main" val="2635223018"/>
+        <p14:creationId xmlns:p14="http://schemas.microsoft.com/office/powerpoint/2010/main" val="2795100158"/>
+      </p:ext>
+    </p:extLst>
+  </p:cSld>
+  <p:clrMapOvr>
+    <a:masterClrMapping/>
+  </p:clrMapOvr>
+</p:sld>
+</file>
+
+<file path=ppt/slides/slide7.xml><?xml version="1.0" encoding="utf-8"?>
+<p:sld xmlns:a="http://schemas.openxmlformats.org/drawingml/2006/main" xmlns:r="http://schemas.openxmlformats.org/officeDocument/2006/relationships" xmlns:p="http://schemas.openxmlformats.org/presentationml/2006/main">
+  <p:cSld>
+    <p:spTree>
+      <p:nvGrpSpPr>
+        <p:cNvPr id="1" name=""/>
+        <p:cNvGrpSpPr/>
+        <p:nvPr/>
+      </p:nvGrpSpPr>
+      <p:grpSpPr>
+        <a:xfrm>
+          <a:off x="0" y="0"/>
+          <a:ext cx="0" cy="0"/>
+          <a:chOff x="0" y="0"/>
+          <a:chExt cx="0" cy="0"/>
+        </a:xfrm>
+      </p:grpSpPr>
+      <p:sp>
+        <p:nvSpPr>
+          <p:cNvPr id="2" name="Title 1">
+            <a:extLst>
+              <a:ext uri="{FF2B5EF4-FFF2-40B4-BE49-F238E27FC236}">
+                <a16:creationId xmlns:a16="http://schemas.microsoft.com/office/drawing/2014/main" id="{441C6FB7-E627-5EB1-ABBE-717D5C86F3C1}"/>
+              </a:ext>
+            </a:extLst>
+          </p:cNvPr>
+          <p:cNvSpPr>
+            <a:spLocks noGrp="1"/>
+          </p:cNvSpPr>
+          <p:nvPr>
+            <p:ph type="title"/>
+          </p:nvPr>
+        </p:nvSpPr>
+        <p:spPr>
+          <a:xfrm>
+            <a:off x="392305" y="526617"/>
+            <a:ext cx="7444991" cy="434504"/>
+          </a:xfrm>
+        </p:spPr>
+        <p:txBody>
+          <a:bodyPr/>
+          <a:lstStyle/>
+          <a:p>
+            <a:r>
+              <a:rPr lang="en-US" altLang="zh-CN" dirty="0">
+                <a:solidFill>
+                  <a:srgbClr val="7030A0"/>
+                </a:solidFill>
+              </a:rPr>
+              <a:t>Configurable web app template</a:t>
+            </a:r>
+            <a:endParaRPr lang="en-US" dirty="0"/>
+          </a:p>
+        </p:txBody>
+      </p:sp>
+      <p:sp>
+        <p:nvSpPr>
+          <p:cNvPr id="3" name="Content Placeholder 2">
+            <a:extLst>
+              <a:ext uri="{FF2B5EF4-FFF2-40B4-BE49-F238E27FC236}">
+                <a16:creationId xmlns:a16="http://schemas.microsoft.com/office/drawing/2014/main" id="{F83BA07D-E06D-FE80-D065-607CBC4C1B0E}"/>
+              </a:ext>
+            </a:extLst>
+          </p:cNvPr>
+          <p:cNvSpPr>
+            <a:spLocks noGrp="1"/>
+          </p:cNvSpPr>
+          <p:nvPr>
+            <p:ph idx="1"/>
+          </p:nvPr>
+        </p:nvSpPr>
+        <p:spPr>
+          <a:xfrm>
+            <a:off x="392306" y="1081529"/>
+            <a:ext cx="7444990" cy="1955347"/>
+          </a:xfrm>
+        </p:spPr>
+        <p:txBody>
+          <a:bodyPr>
+            <a:noAutofit/>
+          </a:bodyPr>
+          <a:lstStyle/>
+          <a:p>
+            <a:r>
+              <a:rPr lang="en-US" sz="1400" dirty="0"/>
+              <a:t>Experience Builder: </a:t>
+            </a:r>
+          </a:p>
+          <a:p>
+            <a:pPr lvl="1">
+              <a:buFont typeface="Wingdings" panose="05000000000000000000" pitchFamily="2" charset="2"/>
+              <a:buChar char="Ø"/>
+            </a:pPr>
+            <a:r>
+              <a:rPr lang="en-US" sz="1400" dirty="0"/>
+              <a:t>Offers a flexible and advanced approach to creating web apps with rich data and rich user experiences. </a:t>
+            </a:r>
+          </a:p>
+          <a:p>
+            <a:pPr lvl="1">
+              <a:buFont typeface="Wingdings" panose="05000000000000000000" pitchFamily="2" charset="2"/>
+              <a:buChar char="Ø"/>
+            </a:pPr>
+            <a:r>
+              <a:rPr lang="en-US" sz="1400" dirty="0"/>
+              <a:t>With drag-and-drop functionality, users can integrate maps, text, images, and other widgets into fully responsive layouts that work across all devices. </a:t>
+            </a:r>
+          </a:p>
+          <a:p>
+            <a:pPr lvl="1">
+              <a:buFont typeface="Wingdings" panose="05000000000000000000" pitchFamily="2" charset="2"/>
+              <a:buChar char="Ø"/>
+            </a:pPr>
+            <a:r>
+              <a:rPr lang="en-US" sz="1400" dirty="0"/>
+              <a:t>Experience Builder is designed for those who want to customize and extend their web applications beyond standard templates.</a:t>
+            </a:r>
+          </a:p>
+        </p:txBody>
+      </p:sp>
+      <p:pic>
+        <p:nvPicPr>
+          <p:cNvPr id="5" name="Picture 4">
+            <a:hlinkClick r:id="rId2"/>
+            <a:extLst>
+              <a:ext uri="{FF2B5EF4-FFF2-40B4-BE49-F238E27FC236}">
+                <a16:creationId xmlns:a16="http://schemas.microsoft.com/office/drawing/2014/main" id="{C0078395-6B20-CFA9-17C6-181B5EF7E3F0}"/>
+              </a:ext>
+            </a:extLst>
+          </p:cNvPr>
+          <p:cNvPicPr>
+            <a:picLocks noChangeAspect="1"/>
+          </p:cNvPicPr>
+          <p:nvPr/>
+        </p:nvPicPr>
+        <p:blipFill>
+          <a:blip r:embed="rId3"/>
+          <a:stretch>
+            <a:fillRect/>
+          </a:stretch>
+        </p:blipFill>
+        <p:spPr>
+          <a:xfrm>
+            <a:off x="1855498" y="3036876"/>
+            <a:ext cx="4518604" cy="1948573"/>
+          </a:xfrm>
+          <a:prstGeom prst="rect">
+            <a:avLst/>
+          </a:prstGeom>
+        </p:spPr>
+      </p:pic>
+    </p:spTree>
+    <p:extLst>
+      <p:ext uri="{BB962C8B-B14F-4D97-AF65-F5344CB8AC3E}">
+        <p14:creationId xmlns:p14="http://schemas.microsoft.com/office/powerpoint/2010/main" val="1691058964"/>
+      </p:ext>
+    </p:extLst>
+  </p:cSld>
+  <p:clrMapOvr>
+    <a:masterClrMapping/>
+  </p:clrMapOvr>
+</p:sld>
+</file>
+
+<file path=ppt/slides/slide8.xml><?xml version="1.0" encoding="utf-8"?>
+<p:sld xmlns:a="http://schemas.openxmlformats.org/drawingml/2006/main" xmlns:r="http://schemas.openxmlformats.org/officeDocument/2006/relationships" xmlns:p="http://schemas.openxmlformats.org/presentationml/2006/main">
+  <p:cSld>
+    <p:spTree>
+      <p:nvGrpSpPr>
+        <p:cNvPr id="1" name=""/>
+        <p:cNvGrpSpPr/>
+        <p:nvPr/>
+      </p:nvGrpSpPr>
+      <p:grpSpPr>
+        <a:xfrm>
+          <a:off x="0" y="0"/>
+          <a:ext cx="0" cy="0"/>
+          <a:chOff x="0" y="0"/>
+          <a:chExt cx="0" cy="0"/>
+        </a:xfrm>
+      </p:grpSpPr>
+      <p:sp>
+        <p:nvSpPr>
+          <p:cNvPr id="2" name="Title 1">
+            <a:extLst>
+              <a:ext uri="{FF2B5EF4-FFF2-40B4-BE49-F238E27FC236}">
+                <a16:creationId xmlns:a16="http://schemas.microsoft.com/office/drawing/2014/main" id="{71170B0C-667D-E92B-778A-A0097EEF621B}"/>
+              </a:ext>
+            </a:extLst>
+          </p:cNvPr>
+          <p:cNvSpPr>
+            <a:spLocks noGrp="1"/>
+          </p:cNvSpPr>
+          <p:nvPr>
+            <p:ph type="title"/>
+          </p:nvPr>
+        </p:nvSpPr>
+        <p:spPr>
+          <a:xfrm>
+            <a:off x="392305" y="526617"/>
+            <a:ext cx="7444991" cy="420440"/>
+          </a:xfrm>
+        </p:spPr>
+        <p:txBody>
+          <a:bodyPr/>
+          <a:lstStyle/>
+          <a:p>
+            <a:r>
+              <a:rPr lang="en-US" altLang="zh-CN" dirty="0">
+                <a:solidFill>
+                  <a:srgbClr val="7030A0"/>
+                </a:solidFill>
+              </a:rPr>
+              <a:t>Configurable web app template</a:t>
+            </a:r>
+            <a:endParaRPr lang="en-US" dirty="0"/>
+          </a:p>
+        </p:txBody>
+      </p:sp>
+      <p:sp>
+        <p:nvSpPr>
+          <p:cNvPr id="3" name="Content Placeholder 2">
+            <a:extLst>
+              <a:ext uri="{FF2B5EF4-FFF2-40B4-BE49-F238E27FC236}">
+                <a16:creationId xmlns:a16="http://schemas.microsoft.com/office/drawing/2014/main" id="{607FF743-C5DE-B39B-0EA7-533370F9E0DC}"/>
+              </a:ext>
+            </a:extLst>
+          </p:cNvPr>
+          <p:cNvSpPr>
+            <a:spLocks noGrp="1"/>
+          </p:cNvSpPr>
+          <p:nvPr>
+            <p:ph idx="1"/>
+          </p:nvPr>
+        </p:nvSpPr>
+        <p:spPr>
+          <a:xfrm>
+            <a:off x="392304" y="1017597"/>
+            <a:ext cx="7444990" cy="1686415"/>
+          </a:xfrm>
+        </p:spPr>
+        <p:txBody>
+          <a:bodyPr/>
+          <a:lstStyle/>
+          <a:p>
+            <a:r>
+              <a:rPr lang="en-US" altLang="zh-CN" dirty="0">
+                <a:solidFill>
+                  <a:schemeClr val="tx1"/>
+                </a:solidFill>
+              </a:rPr>
+              <a:t>Hub: </a:t>
+            </a:r>
+          </a:p>
+          <a:p>
+            <a:pPr lvl="1">
+              <a:buFont typeface="Wingdings" panose="05000000000000000000" pitchFamily="2" charset="2"/>
+              <a:buChar char="Ø"/>
+            </a:pPr>
+            <a:r>
+              <a:rPr lang="en-US" altLang="zh-CN" dirty="0">
+                <a:solidFill>
+                  <a:schemeClr val="tx1"/>
+                </a:solidFill>
+              </a:rPr>
+              <a:t>An engagement platform that enables organizations to connect with their communities through open data, web apps, and interactive initiatives. </a:t>
+            </a:r>
+          </a:p>
+          <a:p>
+            <a:pPr lvl="1">
+              <a:buFont typeface="Wingdings" panose="05000000000000000000" pitchFamily="2" charset="2"/>
+              <a:buChar char="Ø"/>
+            </a:pPr>
+            <a:r>
+              <a:rPr lang="en-US" altLang="zh-CN" dirty="0">
+                <a:solidFill>
+                  <a:schemeClr val="tx1"/>
+                </a:solidFill>
+              </a:rPr>
+              <a:t>It supports collaboration between government, the private sector, and the public to tackle community challenges effectively. </a:t>
+            </a:r>
+          </a:p>
+          <a:p>
+            <a:pPr lvl="1">
+              <a:buFont typeface="Wingdings" panose="05000000000000000000" pitchFamily="2" charset="2"/>
+              <a:buChar char="Ø"/>
+            </a:pPr>
+            <a:r>
+              <a:rPr lang="en-US" altLang="zh-CN" dirty="0">
+                <a:solidFill>
+                  <a:schemeClr val="tx1"/>
+                </a:solidFill>
+              </a:rPr>
+              <a:t>By facilitating easier access to data and tools, Hub helps foster a more informed and involved community, advancing public awareness and participation.</a:t>
+            </a:r>
+            <a:endParaRPr lang="en-US" dirty="0">
+              <a:solidFill>
+                <a:schemeClr val="tx1"/>
+              </a:solidFill>
+            </a:endParaRPr>
+          </a:p>
+        </p:txBody>
+      </p:sp>
+      <p:pic>
+        <p:nvPicPr>
+          <p:cNvPr id="5" name="Picture 4">
+            <a:hlinkClick r:id="rId2"/>
+            <a:extLst>
+              <a:ext uri="{FF2B5EF4-FFF2-40B4-BE49-F238E27FC236}">
+                <a16:creationId xmlns:a16="http://schemas.microsoft.com/office/drawing/2014/main" id="{DE12C3FE-86AC-296A-4385-2992FBC56104}"/>
+              </a:ext>
+            </a:extLst>
+          </p:cNvPr>
+          <p:cNvPicPr>
+            <a:picLocks noChangeAspect="1"/>
+          </p:cNvPicPr>
+          <p:nvPr/>
+        </p:nvPicPr>
+        <p:blipFill>
+          <a:blip r:embed="rId3"/>
+          <a:stretch>
+            <a:fillRect/>
+          </a:stretch>
+        </p:blipFill>
+        <p:spPr>
+          <a:xfrm>
+            <a:off x="300445" y="2965270"/>
+            <a:ext cx="4265023" cy="2083908"/>
+          </a:xfrm>
+          <a:prstGeom prst="rect">
+            <a:avLst/>
+          </a:prstGeom>
+        </p:spPr>
+      </p:pic>
+      <p:pic>
+        <p:nvPicPr>
+          <p:cNvPr id="7" name="Picture 6">
+            <a:hlinkClick r:id="rId4"/>
+            <a:extLst>
+              <a:ext uri="{FF2B5EF4-FFF2-40B4-BE49-F238E27FC236}">
+                <a16:creationId xmlns:a16="http://schemas.microsoft.com/office/drawing/2014/main" id="{1F00645F-8743-EBDF-18B2-713EAD87B13A}"/>
+              </a:ext>
+            </a:extLst>
+          </p:cNvPr>
+          <p:cNvPicPr>
+            <a:picLocks noChangeAspect="1"/>
+          </p:cNvPicPr>
+          <p:nvPr/>
+        </p:nvPicPr>
+        <p:blipFill>
+          <a:blip r:embed="rId5"/>
+          <a:stretch>
+            <a:fillRect/>
+          </a:stretch>
+        </p:blipFill>
+        <p:spPr>
+          <a:xfrm>
+            <a:off x="3784559" y="2965270"/>
+            <a:ext cx="2936616" cy="1910018"/>
+          </a:xfrm>
+          <a:prstGeom prst="rect">
+            <a:avLst/>
+          </a:prstGeom>
+        </p:spPr>
+      </p:pic>
+      <p:pic>
+        <p:nvPicPr>
+          <p:cNvPr id="9" name="Picture 8">
+            <a:hlinkClick r:id="rId6"/>
+            <a:extLst>
+              <a:ext uri="{FF2B5EF4-FFF2-40B4-BE49-F238E27FC236}">
+                <a16:creationId xmlns:a16="http://schemas.microsoft.com/office/drawing/2014/main" id="{9D256423-C6E6-3A7D-8957-9ABD4D4A3918}"/>
+              </a:ext>
+            </a:extLst>
+          </p:cNvPr>
+          <p:cNvPicPr>
+            <a:picLocks noChangeAspect="1"/>
+          </p:cNvPicPr>
+          <p:nvPr/>
+        </p:nvPicPr>
+        <p:blipFill>
+          <a:blip r:embed="rId7"/>
+          <a:stretch>
+            <a:fillRect/>
+          </a:stretch>
+        </p:blipFill>
+        <p:spPr>
+          <a:xfrm>
+            <a:off x="5266335" y="2965270"/>
+            <a:ext cx="2783247" cy="2099743"/>
+          </a:xfrm>
+          <a:prstGeom prst="rect">
+            <a:avLst/>
+          </a:prstGeom>
+        </p:spPr>
+      </p:pic>
+    </p:spTree>
+    <p:extLst>
+      <p:ext uri="{BB962C8B-B14F-4D97-AF65-F5344CB8AC3E}">
+        <p14:creationId xmlns:p14="http://schemas.microsoft.com/office/powerpoint/2010/main" val="2192147743"/>
+      </p:ext>
+    </p:extLst>
+  </p:cSld>
+  <p:clrMapOvr>
+    <a:masterClrMapping/>
+  </p:clrMapOvr>
+</p:sld>
+</file>
+
+<file path=ppt/slides/slide9.xml><?xml version="1.0" encoding="utf-8"?>
+<p:sld xmlns:a="http://schemas.openxmlformats.org/drawingml/2006/main" xmlns:r="http://schemas.openxmlformats.org/officeDocument/2006/relationships" xmlns:p="http://schemas.openxmlformats.org/presentationml/2006/main">
+  <p:cSld>
+    <p:spTree>
+      <p:nvGrpSpPr>
+        <p:cNvPr id="1" name=""/>
+        <p:cNvGrpSpPr/>
+        <p:nvPr/>
+      </p:nvGrpSpPr>
+      <p:grpSpPr>
+        <a:xfrm>
+          <a:off x="0" y="0"/>
+          <a:ext cx="0" cy="0"/>
+          <a:chOff x="0" y="0"/>
+          <a:chExt cx="0" cy="0"/>
+        </a:xfrm>
+      </p:grpSpPr>
+      <p:sp>
+        <p:nvSpPr>
+          <p:cNvPr id="2" name="Title 1">
+            <a:extLst>
+              <a:ext uri="{FF2B5EF4-FFF2-40B4-BE49-F238E27FC236}">
+                <a16:creationId xmlns:a16="http://schemas.microsoft.com/office/drawing/2014/main" id="{0090E850-505C-AF0A-E950-581E253A071D}"/>
+              </a:ext>
+            </a:extLst>
+          </p:cNvPr>
+          <p:cNvSpPr>
+            <a:spLocks noGrp="1"/>
+          </p:cNvSpPr>
+          <p:nvPr>
+            <p:ph type="title"/>
+          </p:nvPr>
+        </p:nvSpPr>
+        <p:spPr>
+          <a:xfrm>
+            <a:off x="392305" y="526617"/>
+            <a:ext cx="7444991" cy="407377"/>
+          </a:xfrm>
+        </p:spPr>
+        <p:txBody>
+          <a:bodyPr/>
+          <a:lstStyle/>
+          <a:p>
+            <a:r>
+              <a:rPr lang="en-US" dirty="0">
+                <a:solidFill>
+                  <a:srgbClr val="7030A0"/>
+                </a:solidFill>
+              </a:rPr>
+              <a:t>web app templates</a:t>
+            </a:r>
+          </a:p>
+        </p:txBody>
+      </p:sp>
+      <p:pic>
+        <p:nvPicPr>
+          <p:cNvPr id="7" name="Content Placeholder 6">
+            <a:extLst>
+              <a:ext uri="{FF2B5EF4-FFF2-40B4-BE49-F238E27FC236}">
+                <a16:creationId xmlns:a16="http://schemas.microsoft.com/office/drawing/2014/main" id="{A4D9E1FC-1967-A7D7-0715-1D9249D6B1FB}"/>
+              </a:ext>
+            </a:extLst>
+          </p:cNvPr>
+          <p:cNvPicPr>
+            <a:picLocks noGrp="1" noChangeAspect="1"/>
+          </p:cNvPicPr>
+          <p:nvPr>
+            <p:ph idx="1"/>
+          </p:nvPr>
+        </p:nvPicPr>
+        <p:blipFill>
+          <a:blip r:embed="rId2"/>
+          <a:stretch>
+            <a:fillRect/>
+          </a:stretch>
+        </p:blipFill>
+        <p:spPr bwMode="auto">
+          <a:xfrm>
+            <a:off x="999003" y="1124794"/>
+            <a:ext cx="6231593" cy="3617976"/>
+          </a:xfrm>
+          <a:prstGeom prst="rect">
+            <a:avLst/>
+          </a:prstGeom>
+          <a:noFill/>
+          <a:extLst>
+            <a:ext uri="{909E8E84-426E-40DD-AFC4-6F175D3DCCD1}">
+              <a14:hiddenFill xmlns:a14="http://schemas.microsoft.com/office/drawing/2010/main">
+                <a:solidFill>
+                  <a:srgbClr val="FFFFFF"/>
+                </a:solidFill>
+              </a14:hiddenFill>
+            </a:ext>
+          </a:extLst>
+        </p:spPr>
+      </p:pic>
+    </p:spTree>
+    <p:extLst>
+      <p:ext uri="{BB962C8B-B14F-4D97-AF65-F5344CB8AC3E}">
+        <p14:creationId xmlns:p14="http://schemas.microsoft.com/office/powerpoint/2010/main" val="641557849"/>
       </p:ext>
     </p:extLst>
   </p:cSld>
